--- a/愛我的天父.pptx
+++ b/愛我的天父.pptx
@@ -5,10 +5,14 @@
     <p:sldMasterId id="2147483660" r:id="rId1"/>
   </p:sldMasterIdLst>
   <p:sldIdLst>
-    <p:sldId id="257" r:id="rId2"/>
-    <p:sldId id="258" r:id="rId3"/>
-    <p:sldId id="259" r:id="rId4"/>
-    <p:sldId id="260" r:id="rId5"/>
+    <p:sldId id="353" r:id="rId2"/>
+    <p:sldId id="390" r:id="rId3"/>
+    <p:sldId id="391" r:id="rId4"/>
+    <p:sldId id="392" r:id="rId5"/>
+    <p:sldId id="393" r:id="rId6"/>
+    <p:sldId id="394" r:id="rId7"/>
+    <p:sldId id="395" r:id="rId8"/>
+    <p:sldId id="396" r:id="rId9"/>
   </p:sldIdLst>
   <p:sldSz cx="12192000" cy="6858000"/>
   <p:notesSz cx="6858000" cy="9144000"/>
@@ -153,7 +157,7 @@
           <a:lstStyle/>
           <a:p>
             <a:r>
-              <a:rPr lang="en-US" altLang="zh-TW" smtClean="0"/>
+              <a:rPr lang="en-US" altLang="zh-TW"/>
               <a:t>Click to edit Master title style</a:t>
             </a:r>
             <a:endParaRPr lang="zh-TW" altLang="en-US"/>
@@ -272,7 +276,7 @@
           </a:lstStyle>
           <a:p>
             <a:r>
-              <a:rPr lang="en-US" altLang="zh-TW" smtClean="0"/>
+              <a:rPr lang="en-US" altLang="zh-TW"/>
               <a:t>Click to edit Master subtitle style</a:t>
             </a:r>
             <a:endParaRPr lang="zh-TW" altLang="en-US"/>
@@ -296,7 +300,7 @@
           <a:p>
             <a:fld id="{A151953B-F8CF-4830-B9AF-6BA053C2CA7B}" type="datetimeFigureOut">
               <a:rPr lang="vi-VN" smtClean="0"/>
-              <a:t>08/07/2023</a:t>
+              <a:t>09/05/2026</a:t>
             </a:fld>
             <a:endParaRPr lang="vi-VN"/>
           </a:p>
@@ -390,7 +394,7 @@
           <a:lstStyle/>
           <a:p>
             <a:r>
-              <a:rPr lang="en-US" altLang="zh-TW" smtClean="0"/>
+              <a:rPr lang="en-US" altLang="zh-TW"/>
               <a:t>Click to edit Master title style</a:t>
             </a:r>
             <a:endParaRPr lang="zh-TW" altLang="en-US"/>
@@ -414,35 +418,35 @@
           <a:p>
             <a:pPr lvl="0"/>
             <a:r>
-              <a:rPr lang="en-US" altLang="zh-TW" smtClean="0"/>
+              <a:rPr lang="en-US" altLang="zh-TW"/>
               <a:t>Edit Master text styles</a:t>
             </a:r>
           </a:p>
           <a:p>
             <a:pPr lvl="1"/>
             <a:r>
-              <a:rPr lang="en-US" altLang="zh-TW" smtClean="0"/>
+              <a:rPr lang="en-US" altLang="zh-TW"/>
               <a:t>Second level</a:t>
             </a:r>
           </a:p>
           <a:p>
             <a:pPr lvl="2"/>
             <a:r>
-              <a:rPr lang="en-US" altLang="zh-TW" smtClean="0"/>
+              <a:rPr lang="en-US" altLang="zh-TW"/>
               <a:t>Third level</a:t>
             </a:r>
           </a:p>
           <a:p>
             <a:pPr lvl="3"/>
             <a:r>
-              <a:rPr lang="en-US" altLang="zh-TW" smtClean="0"/>
+              <a:rPr lang="en-US" altLang="zh-TW"/>
               <a:t>Fourth level</a:t>
             </a:r>
           </a:p>
           <a:p>
             <a:pPr lvl="4"/>
             <a:r>
-              <a:rPr lang="en-US" altLang="zh-TW" smtClean="0"/>
+              <a:rPr lang="en-US" altLang="zh-TW"/>
               <a:t>Fifth level</a:t>
             </a:r>
             <a:endParaRPr lang="zh-TW" altLang="en-US"/>
@@ -466,7 +470,7 @@
           <a:p>
             <a:fld id="{A151953B-F8CF-4830-B9AF-6BA053C2CA7B}" type="datetimeFigureOut">
               <a:rPr lang="vi-VN" smtClean="0"/>
-              <a:t>08/07/2023</a:t>
+              <a:t>09/05/2026</a:t>
             </a:fld>
             <a:endParaRPr lang="vi-VN"/>
           </a:p>
@@ -565,7 +569,7 @@
           <a:lstStyle/>
           <a:p>
             <a:r>
-              <a:rPr lang="en-US" altLang="zh-TW" smtClean="0"/>
+              <a:rPr lang="en-US" altLang="zh-TW"/>
               <a:t>Click to edit Master title style</a:t>
             </a:r>
             <a:endParaRPr lang="zh-TW" altLang="en-US"/>
@@ -594,35 +598,35 @@
           <a:p>
             <a:pPr lvl="0"/>
             <a:r>
-              <a:rPr lang="en-US" altLang="zh-TW" smtClean="0"/>
+              <a:rPr lang="en-US" altLang="zh-TW"/>
               <a:t>Edit Master text styles</a:t>
             </a:r>
           </a:p>
           <a:p>
             <a:pPr lvl="1"/>
             <a:r>
-              <a:rPr lang="en-US" altLang="zh-TW" smtClean="0"/>
+              <a:rPr lang="en-US" altLang="zh-TW"/>
               <a:t>Second level</a:t>
             </a:r>
           </a:p>
           <a:p>
             <a:pPr lvl="2"/>
             <a:r>
-              <a:rPr lang="en-US" altLang="zh-TW" smtClean="0"/>
+              <a:rPr lang="en-US" altLang="zh-TW"/>
               <a:t>Third level</a:t>
             </a:r>
           </a:p>
           <a:p>
             <a:pPr lvl="3"/>
             <a:r>
-              <a:rPr lang="en-US" altLang="zh-TW" smtClean="0"/>
+              <a:rPr lang="en-US" altLang="zh-TW"/>
               <a:t>Fourth level</a:t>
             </a:r>
           </a:p>
           <a:p>
             <a:pPr lvl="4"/>
             <a:r>
-              <a:rPr lang="en-US" altLang="zh-TW" smtClean="0"/>
+              <a:rPr lang="en-US" altLang="zh-TW"/>
               <a:t>Fifth level</a:t>
             </a:r>
             <a:endParaRPr lang="zh-TW" altLang="en-US"/>
@@ -646,7 +650,7 @@
           <a:p>
             <a:fld id="{A151953B-F8CF-4830-B9AF-6BA053C2CA7B}" type="datetimeFigureOut">
               <a:rPr lang="vi-VN" smtClean="0"/>
-              <a:t>08/07/2023</a:t>
+              <a:t>09/05/2026</a:t>
             </a:fld>
             <a:endParaRPr lang="vi-VN"/>
           </a:p>
@@ -740,7 +744,7 @@
           <a:lstStyle/>
           <a:p>
             <a:r>
-              <a:rPr lang="en-US" altLang="zh-TW" smtClean="0"/>
+              <a:rPr lang="en-US" altLang="zh-TW"/>
               <a:t>Click to edit Master title style</a:t>
             </a:r>
             <a:endParaRPr lang="zh-TW" altLang="en-US"/>
@@ -764,35 +768,35 @@
           <a:p>
             <a:pPr lvl="0"/>
             <a:r>
-              <a:rPr lang="en-US" altLang="zh-TW" smtClean="0"/>
+              <a:rPr lang="en-US" altLang="zh-TW"/>
               <a:t>Edit Master text styles</a:t>
             </a:r>
           </a:p>
           <a:p>
             <a:pPr lvl="1"/>
             <a:r>
-              <a:rPr lang="en-US" altLang="zh-TW" smtClean="0"/>
+              <a:rPr lang="en-US" altLang="zh-TW"/>
               <a:t>Second level</a:t>
             </a:r>
           </a:p>
           <a:p>
             <a:pPr lvl="2"/>
             <a:r>
-              <a:rPr lang="en-US" altLang="zh-TW" smtClean="0"/>
+              <a:rPr lang="en-US" altLang="zh-TW"/>
               <a:t>Third level</a:t>
             </a:r>
           </a:p>
           <a:p>
             <a:pPr lvl="3"/>
             <a:r>
-              <a:rPr lang="en-US" altLang="zh-TW" smtClean="0"/>
+              <a:rPr lang="en-US" altLang="zh-TW"/>
               <a:t>Fourth level</a:t>
             </a:r>
           </a:p>
           <a:p>
             <a:pPr lvl="4"/>
             <a:r>
-              <a:rPr lang="en-US" altLang="zh-TW" smtClean="0"/>
+              <a:rPr lang="en-US" altLang="zh-TW"/>
               <a:t>Fifth level</a:t>
             </a:r>
             <a:endParaRPr lang="zh-TW" altLang="en-US"/>
@@ -816,7 +820,7 @@
           <a:p>
             <a:fld id="{A151953B-F8CF-4830-B9AF-6BA053C2CA7B}" type="datetimeFigureOut">
               <a:rPr lang="vi-VN" smtClean="0"/>
-              <a:t>08/07/2023</a:t>
+              <a:t>09/05/2026</a:t>
             </a:fld>
             <a:endParaRPr lang="vi-VN"/>
           </a:p>
@@ -919,7 +923,7 @@
           </a:lstStyle>
           <a:p>
             <a:r>
-              <a:rPr lang="en-US" altLang="zh-TW" smtClean="0"/>
+              <a:rPr lang="en-US" altLang="zh-TW"/>
               <a:t>Click to edit Master title style</a:t>
             </a:r>
             <a:endParaRPr lang="zh-TW" altLang="en-US"/>
@@ -1039,7 +1043,7 @@
           <a:p>
             <a:pPr lvl="0"/>
             <a:r>
-              <a:rPr lang="en-US" altLang="zh-TW" smtClean="0"/>
+              <a:rPr lang="en-US" altLang="zh-TW"/>
               <a:t>Edit Master text styles</a:t>
             </a:r>
           </a:p>
@@ -1062,7 +1066,7 @@
           <a:p>
             <a:fld id="{A151953B-F8CF-4830-B9AF-6BA053C2CA7B}" type="datetimeFigureOut">
               <a:rPr lang="vi-VN" smtClean="0"/>
-              <a:t>08/07/2023</a:t>
+              <a:t>09/05/2026</a:t>
             </a:fld>
             <a:endParaRPr lang="vi-VN"/>
           </a:p>
@@ -1156,7 +1160,7 @@
           <a:lstStyle/>
           <a:p>
             <a:r>
-              <a:rPr lang="en-US" altLang="zh-TW" smtClean="0"/>
+              <a:rPr lang="en-US" altLang="zh-TW"/>
               <a:t>Click to edit Master title style</a:t>
             </a:r>
             <a:endParaRPr lang="zh-TW" altLang="en-US"/>
@@ -1213,35 +1217,35 @@
           <a:p>
             <a:pPr lvl="0"/>
             <a:r>
-              <a:rPr lang="en-US" altLang="zh-TW" smtClean="0"/>
+              <a:rPr lang="en-US" altLang="zh-TW"/>
               <a:t>Edit Master text styles</a:t>
             </a:r>
           </a:p>
           <a:p>
             <a:pPr lvl="1"/>
             <a:r>
-              <a:rPr lang="en-US" altLang="zh-TW" smtClean="0"/>
+              <a:rPr lang="en-US" altLang="zh-TW"/>
               <a:t>Second level</a:t>
             </a:r>
           </a:p>
           <a:p>
             <a:pPr lvl="2"/>
             <a:r>
-              <a:rPr lang="en-US" altLang="zh-TW" smtClean="0"/>
+              <a:rPr lang="en-US" altLang="zh-TW"/>
               <a:t>Third level</a:t>
             </a:r>
           </a:p>
           <a:p>
             <a:pPr lvl="3"/>
             <a:r>
-              <a:rPr lang="en-US" altLang="zh-TW" smtClean="0"/>
+              <a:rPr lang="en-US" altLang="zh-TW"/>
               <a:t>Fourth level</a:t>
             </a:r>
           </a:p>
           <a:p>
             <a:pPr lvl="4"/>
             <a:r>
-              <a:rPr lang="en-US" altLang="zh-TW" smtClean="0"/>
+              <a:rPr lang="en-US" altLang="zh-TW"/>
               <a:t>Fifth level</a:t>
             </a:r>
             <a:endParaRPr lang="zh-TW" altLang="en-US"/>
@@ -1298,35 +1302,35 @@
           <a:p>
             <a:pPr lvl="0"/>
             <a:r>
-              <a:rPr lang="en-US" altLang="zh-TW" smtClean="0"/>
+              <a:rPr lang="en-US" altLang="zh-TW"/>
               <a:t>Edit Master text styles</a:t>
             </a:r>
           </a:p>
           <a:p>
             <a:pPr lvl="1"/>
             <a:r>
-              <a:rPr lang="en-US" altLang="zh-TW" smtClean="0"/>
+              <a:rPr lang="en-US" altLang="zh-TW"/>
               <a:t>Second level</a:t>
             </a:r>
           </a:p>
           <a:p>
             <a:pPr lvl="2"/>
             <a:r>
-              <a:rPr lang="en-US" altLang="zh-TW" smtClean="0"/>
+              <a:rPr lang="en-US" altLang="zh-TW"/>
               <a:t>Third level</a:t>
             </a:r>
           </a:p>
           <a:p>
             <a:pPr lvl="3"/>
             <a:r>
-              <a:rPr lang="en-US" altLang="zh-TW" smtClean="0"/>
+              <a:rPr lang="en-US" altLang="zh-TW"/>
               <a:t>Fourth level</a:t>
             </a:r>
           </a:p>
           <a:p>
             <a:pPr lvl="4"/>
             <a:r>
-              <a:rPr lang="en-US" altLang="zh-TW" smtClean="0"/>
+              <a:rPr lang="en-US" altLang="zh-TW"/>
               <a:t>Fifth level</a:t>
             </a:r>
             <a:endParaRPr lang="zh-TW" altLang="en-US"/>
@@ -1350,7 +1354,7 @@
           <a:p>
             <a:fld id="{A151953B-F8CF-4830-B9AF-6BA053C2CA7B}" type="datetimeFigureOut">
               <a:rPr lang="vi-VN" smtClean="0"/>
-              <a:t>08/07/2023</a:t>
+              <a:t>09/05/2026</a:t>
             </a:fld>
             <a:endParaRPr lang="vi-VN"/>
           </a:p>
@@ -1448,7 +1452,7 @@
           </a:lstStyle>
           <a:p>
             <a:r>
-              <a:rPr lang="en-US" altLang="zh-TW" smtClean="0"/>
+              <a:rPr lang="en-US" altLang="zh-TW"/>
               <a:t>Click to edit Master title style</a:t>
             </a:r>
             <a:endParaRPr lang="zh-TW" altLang="en-US"/>
@@ -1514,7 +1518,7 @@
           <a:p>
             <a:pPr lvl="0"/>
             <a:r>
-              <a:rPr lang="en-US" altLang="zh-TW" smtClean="0"/>
+              <a:rPr lang="en-US" altLang="zh-TW"/>
               <a:t>Edit Master text styles</a:t>
             </a:r>
           </a:p>
@@ -1570,35 +1574,35 @@
           <a:p>
             <a:pPr lvl="0"/>
             <a:r>
-              <a:rPr lang="en-US" altLang="zh-TW" smtClean="0"/>
+              <a:rPr lang="en-US" altLang="zh-TW"/>
               <a:t>Edit Master text styles</a:t>
             </a:r>
           </a:p>
           <a:p>
             <a:pPr lvl="1"/>
             <a:r>
-              <a:rPr lang="en-US" altLang="zh-TW" smtClean="0"/>
+              <a:rPr lang="en-US" altLang="zh-TW"/>
               <a:t>Second level</a:t>
             </a:r>
           </a:p>
           <a:p>
             <a:pPr lvl="2"/>
             <a:r>
-              <a:rPr lang="en-US" altLang="zh-TW" smtClean="0"/>
+              <a:rPr lang="en-US" altLang="zh-TW"/>
               <a:t>Third level</a:t>
             </a:r>
           </a:p>
           <a:p>
             <a:pPr lvl="3"/>
             <a:r>
-              <a:rPr lang="en-US" altLang="zh-TW" smtClean="0"/>
+              <a:rPr lang="en-US" altLang="zh-TW"/>
               <a:t>Fourth level</a:t>
             </a:r>
           </a:p>
           <a:p>
             <a:pPr lvl="4"/>
             <a:r>
-              <a:rPr lang="en-US" altLang="zh-TW" smtClean="0"/>
+              <a:rPr lang="en-US" altLang="zh-TW"/>
               <a:t>Fifth level</a:t>
             </a:r>
             <a:endParaRPr lang="zh-TW" altLang="en-US"/>
@@ -1664,7 +1668,7 @@
           <a:p>
             <a:pPr lvl="0"/>
             <a:r>
-              <a:rPr lang="en-US" altLang="zh-TW" smtClean="0"/>
+              <a:rPr lang="en-US" altLang="zh-TW"/>
               <a:t>Edit Master text styles</a:t>
             </a:r>
           </a:p>
@@ -1720,35 +1724,35 @@
           <a:p>
             <a:pPr lvl="0"/>
             <a:r>
-              <a:rPr lang="en-US" altLang="zh-TW" smtClean="0"/>
+              <a:rPr lang="en-US" altLang="zh-TW"/>
               <a:t>Edit Master text styles</a:t>
             </a:r>
           </a:p>
           <a:p>
             <a:pPr lvl="1"/>
             <a:r>
-              <a:rPr lang="en-US" altLang="zh-TW" smtClean="0"/>
+              <a:rPr lang="en-US" altLang="zh-TW"/>
               <a:t>Second level</a:t>
             </a:r>
           </a:p>
           <a:p>
             <a:pPr lvl="2"/>
             <a:r>
-              <a:rPr lang="en-US" altLang="zh-TW" smtClean="0"/>
+              <a:rPr lang="en-US" altLang="zh-TW"/>
               <a:t>Third level</a:t>
             </a:r>
           </a:p>
           <a:p>
             <a:pPr lvl="3"/>
             <a:r>
-              <a:rPr lang="en-US" altLang="zh-TW" smtClean="0"/>
+              <a:rPr lang="en-US" altLang="zh-TW"/>
               <a:t>Fourth level</a:t>
             </a:r>
           </a:p>
           <a:p>
             <a:pPr lvl="4"/>
             <a:r>
-              <a:rPr lang="en-US" altLang="zh-TW" smtClean="0"/>
+              <a:rPr lang="en-US" altLang="zh-TW"/>
               <a:t>Fifth level</a:t>
             </a:r>
             <a:endParaRPr lang="zh-TW" altLang="en-US"/>
@@ -1772,7 +1776,7 @@
           <a:p>
             <a:fld id="{A151953B-F8CF-4830-B9AF-6BA053C2CA7B}" type="datetimeFigureOut">
               <a:rPr lang="vi-VN" smtClean="0"/>
-              <a:t>08/07/2023</a:t>
+              <a:t>09/05/2026</a:t>
             </a:fld>
             <a:endParaRPr lang="vi-VN"/>
           </a:p>
@@ -1866,7 +1870,7 @@
           <a:lstStyle/>
           <a:p>
             <a:r>
-              <a:rPr lang="en-US" altLang="zh-TW" smtClean="0"/>
+              <a:rPr lang="en-US" altLang="zh-TW"/>
               <a:t>Click to edit Master title style</a:t>
             </a:r>
             <a:endParaRPr lang="zh-TW" altLang="en-US"/>
@@ -1890,7 +1894,7 @@
           <a:p>
             <a:fld id="{A151953B-F8CF-4830-B9AF-6BA053C2CA7B}" type="datetimeFigureOut">
               <a:rPr lang="vi-VN" smtClean="0"/>
-              <a:t>08/07/2023</a:t>
+              <a:t>09/05/2026</a:t>
             </a:fld>
             <a:endParaRPr lang="vi-VN"/>
           </a:p>
@@ -1985,7 +1989,7 @@
           <a:p>
             <a:fld id="{A151953B-F8CF-4830-B9AF-6BA053C2CA7B}" type="datetimeFigureOut">
               <a:rPr lang="vi-VN" smtClean="0"/>
-              <a:t>08/07/2023</a:t>
+              <a:t>09/05/2026</a:t>
             </a:fld>
             <a:endParaRPr lang="vi-VN"/>
           </a:p>
@@ -2088,7 +2092,7 @@
           </a:lstStyle>
           <a:p>
             <a:r>
-              <a:rPr lang="en-US" altLang="zh-TW" smtClean="0"/>
+              <a:rPr lang="en-US" altLang="zh-TW"/>
               <a:t>Click to edit Master title style</a:t>
             </a:r>
             <a:endParaRPr lang="zh-TW" altLang="en-US"/>
@@ -2145,35 +2149,35 @@
           <a:p>
             <a:pPr lvl="0"/>
             <a:r>
-              <a:rPr lang="en-US" altLang="zh-TW" smtClean="0"/>
+              <a:rPr lang="en-US" altLang="zh-TW"/>
               <a:t>Edit Master text styles</a:t>
             </a:r>
           </a:p>
           <a:p>
             <a:pPr lvl="1"/>
             <a:r>
-              <a:rPr lang="en-US" altLang="zh-TW" smtClean="0"/>
+              <a:rPr lang="en-US" altLang="zh-TW"/>
               <a:t>Second level</a:t>
             </a:r>
           </a:p>
           <a:p>
             <a:pPr lvl="2"/>
             <a:r>
-              <a:rPr lang="en-US" altLang="zh-TW" smtClean="0"/>
+              <a:rPr lang="en-US" altLang="zh-TW"/>
               <a:t>Third level</a:t>
             </a:r>
           </a:p>
           <a:p>
             <a:pPr lvl="3"/>
             <a:r>
-              <a:rPr lang="en-US" altLang="zh-TW" smtClean="0"/>
+              <a:rPr lang="en-US" altLang="zh-TW"/>
               <a:t>Fourth level</a:t>
             </a:r>
           </a:p>
           <a:p>
             <a:pPr lvl="4"/>
             <a:r>
-              <a:rPr lang="en-US" altLang="zh-TW" smtClean="0"/>
+              <a:rPr lang="en-US" altLang="zh-TW"/>
               <a:t>Fifth level</a:t>
             </a:r>
             <a:endParaRPr lang="zh-TW" altLang="en-US"/>
@@ -2239,7 +2243,7 @@
           <a:p>
             <a:pPr lvl="0"/>
             <a:r>
-              <a:rPr lang="en-US" altLang="zh-TW" smtClean="0"/>
+              <a:rPr lang="en-US" altLang="zh-TW"/>
               <a:t>Edit Master text styles</a:t>
             </a:r>
           </a:p>
@@ -2262,7 +2266,7 @@
           <a:p>
             <a:fld id="{A151953B-F8CF-4830-B9AF-6BA053C2CA7B}" type="datetimeFigureOut">
               <a:rPr lang="vi-VN" smtClean="0"/>
-              <a:t>08/07/2023</a:t>
+              <a:t>09/05/2026</a:t>
             </a:fld>
             <a:endParaRPr lang="vi-VN"/>
           </a:p>
@@ -2365,7 +2369,7 @@
           </a:lstStyle>
           <a:p>
             <a:r>
-              <a:rPr lang="en-US" altLang="zh-TW" smtClean="0"/>
+              <a:rPr lang="en-US" altLang="zh-TW"/>
               <a:t>Click to edit Master title style</a:t>
             </a:r>
             <a:endParaRPr lang="zh-TW" altLang="en-US"/>
@@ -2430,7 +2434,7 @@
           </a:lstStyle>
           <a:p>
             <a:r>
-              <a:rPr lang="en-US" altLang="zh-TW" smtClean="0"/>
+              <a:rPr lang="en-US" altLang="zh-TW"/>
               <a:t>Click icon to add picture</a:t>
             </a:r>
             <a:endParaRPr lang="zh-TW" altLang="en-US"/>
@@ -2496,7 +2500,7 @@
           <a:p>
             <a:pPr lvl="0"/>
             <a:r>
-              <a:rPr lang="en-US" altLang="zh-TW" smtClean="0"/>
+              <a:rPr lang="en-US" altLang="zh-TW"/>
               <a:t>Edit Master text styles</a:t>
             </a:r>
           </a:p>
@@ -2519,7 +2523,7 @@
           <a:p>
             <a:fld id="{A151953B-F8CF-4830-B9AF-6BA053C2CA7B}" type="datetimeFigureOut">
               <a:rPr lang="vi-VN" smtClean="0"/>
-              <a:t>08/07/2023</a:t>
+              <a:t>09/05/2026</a:t>
             </a:fld>
             <a:endParaRPr lang="vi-VN"/>
           </a:p>
@@ -2633,10 +2637,9 @@
           <a:lstStyle/>
           <a:p>
             <a:r>
-              <a:rPr lang="zh-TW" altLang="en-US" smtClean="0"/>
+              <a:rPr lang="zh-TW" altLang="en-US"/>
               <a:t>按一下以編輯母片標題樣式</a:t>
             </a:r>
-            <a:endParaRPr lang="zh-TW" altLang="en-US"/>
           </a:p>
         </p:txBody>
       </p:sp>
@@ -2667,38 +2670,37 @@
           <a:p>
             <a:pPr lvl="0"/>
             <a:r>
-              <a:rPr lang="zh-TW" altLang="en-US" smtClean="0"/>
+              <a:rPr lang="zh-TW" altLang="en-US"/>
               <a:t>按一下以編輯母片文字樣式</a:t>
             </a:r>
           </a:p>
           <a:p>
             <a:pPr lvl="1"/>
             <a:r>
-              <a:rPr lang="zh-TW" altLang="en-US" smtClean="0"/>
+              <a:rPr lang="zh-TW" altLang="en-US"/>
               <a:t>第二層</a:t>
             </a:r>
           </a:p>
           <a:p>
             <a:pPr lvl="2"/>
             <a:r>
-              <a:rPr lang="zh-TW" altLang="en-US" smtClean="0"/>
+              <a:rPr lang="zh-TW" altLang="en-US"/>
               <a:t>第三層</a:t>
             </a:r>
           </a:p>
           <a:p>
             <a:pPr lvl="3"/>
             <a:r>
-              <a:rPr lang="zh-TW" altLang="en-US" smtClean="0"/>
+              <a:rPr lang="zh-TW" altLang="en-US"/>
               <a:t>第四層</a:t>
             </a:r>
           </a:p>
           <a:p>
             <a:pPr lvl="4"/>
             <a:r>
-              <a:rPr lang="zh-TW" altLang="en-US" smtClean="0"/>
+              <a:rPr lang="zh-TW" altLang="en-US"/>
               <a:t>第五層</a:t>
             </a:r>
-            <a:endParaRPr lang="zh-TW" altLang="en-US"/>
           </a:p>
         </p:txBody>
       </p:sp>
@@ -2737,7 +2739,7 @@
           <a:p>
             <a:fld id="{A151953B-F8CF-4830-B9AF-6BA053C2CA7B}" type="datetimeFigureOut">
               <a:rPr lang="vi-VN" smtClean="0"/>
-              <a:t>08/07/2023</a:t>
+              <a:t>09/05/2026</a:t>
             </a:fld>
             <a:endParaRPr lang="vi-VN"/>
           </a:p>
@@ -3114,7 +3116,7 @@
       </p:grpSpPr>
       <p:sp>
         <p:nvSpPr>
-          <p:cNvPr id="2" name="Title 1"/>
+          <p:cNvPr id="4" name="標題 3"/>
           <p:cNvSpPr>
             <a:spLocks noGrp="1"/>
           </p:cNvSpPr>
@@ -3122,121 +3124,39 @@
             <p:ph type="title"/>
           </p:nvPr>
         </p:nvSpPr>
-        <p:spPr/>
+        <p:spPr>
+          <a:xfrm>
+            <a:off x="0" y="2660915"/>
+            <a:ext cx="12192000" cy="1143000"/>
+          </a:xfrm>
+        </p:spPr>
         <p:txBody>
           <a:bodyPr>
-            <a:normAutofit/>
+            <a:noAutofit/>
           </a:bodyPr>
           <a:lstStyle/>
           <a:p>
             <a:r>
-              <a:rPr lang="zh-CN" altLang="en-US" sz="4800" b="1" dirty="0" smtClean="0">
-                <a:latin typeface="Microsoft JhengHei" panose="020B0604030504040204" pitchFamily="34" charset="-120"/>
-                <a:ea typeface="Microsoft JhengHei" panose="020B0604030504040204" pitchFamily="34" charset="-120"/>
+              <a:rPr lang="zh-TW" altLang="en-US" sz="7200" b="1" i="1" dirty="0">
+                <a:solidFill>
+                  <a:srgbClr val="660033"/>
+                </a:solidFill>
+                <a:effectLst>
+                  <a:outerShdw blurRad="38100" dist="38100" dir="2700000" algn="tl">
+                    <a:srgbClr val="000000">
+                      <a:alpha val="43137"/>
+                    </a:srgbClr>
+                  </a:outerShdw>
+                </a:effectLst>
+                <a:latin typeface="微軟正黑體" pitchFamily="34" charset="-120"/>
+                <a:ea typeface="微軟正黑體" pitchFamily="34" charset="-120"/>
               </a:rPr>
               <a:t>愛我的天父</a:t>
             </a:r>
-            <a:endParaRPr lang="vi-VN" sz="4800" b="1" dirty="0">
-              <a:ea typeface="Microsoft JhengHei" panose="020B0604030504040204" pitchFamily="34" charset="-120"/>
-            </a:endParaRPr>
-          </a:p>
-        </p:txBody>
-      </p:sp>
-      <p:sp>
-        <p:nvSpPr>
-          <p:cNvPr id="3" name="Content Placeholder 2"/>
-          <p:cNvSpPr>
-            <a:spLocks noGrp="1"/>
-          </p:cNvSpPr>
-          <p:nvPr>
-            <p:ph idx="1"/>
-          </p:nvPr>
-        </p:nvSpPr>
-        <p:spPr/>
-        <p:txBody>
-          <a:bodyPr>
-            <a:normAutofit/>
-          </a:bodyPr>
-          <a:lstStyle/>
-          <a:p>
-            <a:pPr marL="0" indent="0" algn="ctr">
-              <a:buNone/>
-            </a:pPr>
-            <a:r>
-              <a:rPr lang="zh-CN" altLang="en-US" sz="6000" b="1" dirty="0" smtClean="0">
-                <a:latin typeface="Microsoft JhengHei" panose="020B0604030504040204" pitchFamily="34" charset="-120"/>
-                <a:ea typeface="Microsoft JhengHei" panose="020B0604030504040204" pitchFamily="34" charset="-120"/>
-              </a:rPr>
-              <a:t>我有一位愛我的天父</a:t>
-            </a:r>
-            <a:endParaRPr lang="en-US" altLang="zh-CN" sz="6000" b="1" dirty="0" smtClean="0">
-              <a:latin typeface="Microsoft JhengHei" panose="020B0604030504040204" pitchFamily="34" charset="-120"/>
-              <a:ea typeface="Microsoft JhengHei" panose="020B0604030504040204" pitchFamily="34" charset="-120"/>
-            </a:endParaRPr>
-          </a:p>
-          <a:p>
-            <a:pPr marL="0" indent="0" algn="ctr">
-              <a:buNone/>
-            </a:pPr>
-            <a:r>
-              <a:rPr lang="zh-CN" altLang="en-US" sz="6000" b="1" dirty="0" smtClean="0">
-                <a:latin typeface="Microsoft JhengHei" panose="020B0604030504040204" pitchFamily="34" charset="-120"/>
-                <a:ea typeface="Microsoft JhengHei" panose="020B0604030504040204" pitchFamily="34" charset="-120"/>
-              </a:rPr>
-              <a:t>祂造我就是為了愛我</a:t>
-            </a:r>
-            <a:endParaRPr lang="en-US" altLang="zh-CN" sz="6000" b="1" dirty="0" smtClean="0">
-              <a:latin typeface="Microsoft JhengHei" panose="020B0604030504040204" pitchFamily="34" charset="-120"/>
-              <a:ea typeface="Microsoft JhengHei" panose="020B0604030504040204" pitchFamily="34" charset="-120"/>
-            </a:endParaRPr>
-          </a:p>
-          <a:p>
-            <a:pPr marL="0" indent="0" algn="ctr">
-              <a:buNone/>
-            </a:pPr>
-            <a:r>
-              <a:rPr lang="zh-CN" altLang="en-US" sz="6000" b="1" dirty="0">
-                <a:latin typeface="Microsoft JhengHei" panose="020B0604030504040204" pitchFamily="34" charset="-120"/>
-                <a:ea typeface="Microsoft JhengHei" panose="020B0604030504040204" pitchFamily="34" charset="-120"/>
-              </a:rPr>
-              <a:t>不</a:t>
-            </a:r>
-            <a:r>
-              <a:rPr lang="zh-CN" altLang="en-US" sz="6000" b="1" dirty="0" smtClean="0">
-                <a:latin typeface="Microsoft JhengHei" panose="020B0604030504040204" pitchFamily="34" charset="-120"/>
-                <a:ea typeface="Microsoft JhengHei" panose="020B0604030504040204" pitchFamily="34" charset="-120"/>
-              </a:rPr>
-              <a:t>論高矮或胖瘦未來成就是如何</a:t>
-            </a:r>
-            <a:endParaRPr lang="en-US" altLang="zh-CN" sz="6000" b="1" dirty="0" smtClean="0">
-              <a:latin typeface="Microsoft JhengHei" panose="020B0604030504040204" pitchFamily="34" charset="-120"/>
-              <a:ea typeface="Microsoft JhengHei" panose="020B0604030504040204" pitchFamily="34" charset="-120"/>
-            </a:endParaRPr>
-          </a:p>
-          <a:p>
-            <a:pPr marL="0" indent="0" algn="ctr">
-              <a:buNone/>
-            </a:pPr>
-            <a:r>
-              <a:rPr lang="zh-CN" altLang="en-US" sz="6000" b="1" dirty="0" smtClean="0">
-                <a:latin typeface="Microsoft JhengHei" panose="020B0604030504040204" pitchFamily="34" charset="-120"/>
-                <a:ea typeface="Microsoft JhengHei" panose="020B0604030504040204" pitchFamily="34" charset="-120"/>
-              </a:rPr>
-              <a:t>祂仍然比任何人都愛我</a:t>
-            </a:r>
-            <a:endParaRPr lang="en-US" altLang="zh-CN" sz="6000" b="1" dirty="0" smtClean="0">
-              <a:latin typeface="Microsoft JhengHei" panose="020B0604030504040204" pitchFamily="34" charset="-120"/>
-              <a:ea typeface="Microsoft JhengHei" panose="020B0604030504040204" pitchFamily="34" charset="-120"/>
-            </a:endParaRPr>
           </a:p>
         </p:txBody>
       </p:sp>
     </p:spTree>
-    <p:extLst>
-      <p:ext uri="{BB962C8B-B14F-4D97-AF65-F5344CB8AC3E}">
-        <p14:creationId xmlns:p14="http://schemas.microsoft.com/office/powerpoint/2010/main" val="2544539299"/>
-      </p:ext>
-    </p:extLst>
   </p:cSld>
   <p:clrMapOvr>
     <a:masterClrMapping/>
@@ -3263,130 +3183,120 @@
       </p:grpSpPr>
       <p:sp>
         <p:nvSpPr>
-          <p:cNvPr id="2" name="Title 1"/>
-          <p:cNvSpPr>
-            <a:spLocks noGrp="1"/>
-          </p:cNvSpPr>
-          <p:nvPr>
-            <p:ph type="title"/>
-          </p:nvPr>
-        </p:nvSpPr>
-        <p:spPr/>
-        <p:txBody>
-          <a:bodyPr>
+          <p:cNvPr id="5" name="內容版面配置區 4"/>
+          <p:cNvSpPr>
+            <a:spLocks noGrp="1"/>
+          </p:cNvSpPr>
+          <p:nvPr>
+            <p:ph idx="1"/>
+          </p:nvPr>
+        </p:nvSpPr>
+        <p:spPr>
+          <a:xfrm>
+            <a:off x="0" y="2084851"/>
+            <a:ext cx="12192000" cy="2404863"/>
+          </a:xfrm>
+        </p:spPr>
+        <p:txBody>
+          <a:bodyPr anchor="ctr">
             <a:normAutofit/>
           </a:bodyPr>
           <a:lstStyle/>
           <a:p>
-            <a:r>
-              <a:rPr lang="zh-CN" altLang="en-US" sz="4800" b="1" dirty="0">
+            <a:pPr algn="ctr">
+              <a:buNone/>
+            </a:pPr>
+            <a:r>
+              <a:rPr lang="zh-TW" altLang="en-US" sz="6400" b="1" dirty="0">
+                <a:solidFill>
+                  <a:srgbClr val="660033"/>
+                </a:solidFill>
+                <a:latin typeface="微軟正黑體" pitchFamily="34" charset="-120"/>
+                <a:ea typeface="微軟正黑體" pitchFamily="34" charset="-120"/>
+              </a:rPr>
+              <a:t>我有一位愛我的天父</a:t>
+            </a:r>
+          </a:p>
+          <a:p>
+            <a:pPr algn="ctr">
+              <a:buNone/>
+            </a:pPr>
+            <a:r>
+              <a:rPr lang="zh-TW" altLang="en-US" sz="6400" b="1" dirty="0">
+                <a:solidFill>
+                  <a:srgbClr val="660033"/>
+                </a:solidFill>
+                <a:latin typeface="微軟正黑體" pitchFamily="34" charset="-120"/>
+                <a:ea typeface="微軟正黑體" pitchFamily="34" charset="-120"/>
+              </a:rPr>
+              <a:t>祂造我就是為了愛我</a:t>
+            </a:r>
+          </a:p>
+        </p:txBody>
+      </p:sp>
+      <p:sp>
+        <p:nvSpPr>
+          <p:cNvPr id="3" name="TextBox 2"/>
+          <p:cNvSpPr txBox="1"/>
+          <p:nvPr/>
+        </p:nvSpPr>
+        <p:spPr>
+          <a:xfrm>
+            <a:off x="0" y="5157193"/>
+            <a:ext cx="12192000" cy="584775"/>
+          </a:xfrm>
+          <a:prstGeom prst="rect">
+            <a:avLst/>
+          </a:prstGeom>
+          <a:noFill/>
+        </p:spPr>
+        <p:txBody>
+          <a:bodyPr wrap="square" rtlCol="0">
+            <a:spAutoFit/>
+          </a:bodyPr>
+          <a:lstStyle/>
+          <a:p>
+            <a:pPr algn="ctr"/>
+            <a:r>
+              <a:rPr lang="en-US" sz="3200" b="1" dirty="0">
+                <a:solidFill>
+                  <a:srgbClr val="660033"/>
+                </a:solidFill>
                 <a:latin typeface="Microsoft JhengHei" panose="020B0604030504040204" pitchFamily="34" charset="-120"/>
                 <a:ea typeface="Microsoft JhengHei" panose="020B0604030504040204" pitchFamily="34" charset="-120"/>
               </a:rPr>
-              <a:t>愛我的天父</a:t>
-            </a:r>
-            <a:endParaRPr lang="vi-VN" sz="4800" b="1" dirty="0">
-              <a:latin typeface="Microsoft JhengHei" panose="020B0604030504040204" pitchFamily="34" charset="-120"/>
-              <a:ea typeface="Microsoft JhengHei" panose="020B0604030504040204" pitchFamily="34" charset="-120"/>
-            </a:endParaRPr>
-          </a:p>
-        </p:txBody>
-      </p:sp>
-      <p:sp>
-        <p:nvSpPr>
-          <p:cNvPr id="3" name="Content Placeholder 2"/>
-          <p:cNvSpPr>
-            <a:spLocks noGrp="1"/>
-          </p:cNvSpPr>
-          <p:nvPr>
-            <p:ph idx="1"/>
-          </p:nvPr>
-        </p:nvSpPr>
-        <p:spPr/>
-        <p:txBody>
-          <a:bodyPr>
-            <a:normAutofit/>
-          </a:bodyPr>
-          <a:lstStyle/>
-          <a:p>
-            <a:pPr marL="0" indent="0" algn="ctr">
-              <a:buNone/>
-            </a:pPr>
-            <a:r>
-              <a:rPr lang="zh-CN" altLang="en-US" sz="6000" b="1" dirty="0">
+              <a:t>( </a:t>
+            </a:r>
+            <a:r>
+              <a:rPr lang="zh-CN" altLang="en-US" sz="3200" b="1" dirty="0">
+                <a:solidFill>
+                  <a:srgbClr val="660033"/>
+                </a:solidFill>
                 <a:latin typeface="Microsoft JhengHei" panose="020B0604030504040204" pitchFamily="34" charset="-120"/>
                 <a:ea typeface="Microsoft JhengHei" panose="020B0604030504040204" pitchFamily="34" charset="-120"/>
               </a:rPr>
-              <a:t>祂永遠不離開我</a:t>
-            </a:r>
-            <a:endParaRPr lang="en-US" altLang="zh-CN" sz="6000" b="1" dirty="0">
-              <a:latin typeface="Microsoft JhengHei" panose="020B0604030504040204" pitchFamily="34" charset="-120"/>
-              <a:ea typeface="Microsoft JhengHei" panose="020B0604030504040204" pitchFamily="34" charset="-120"/>
-            </a:endParaRPr>
-          </a:p>
-          <a:p>
-            <a:pPr marL="0" indent="0" algn="ctr">
-              <a:buNone/>
-            </a:pPr>
-            <a:r>
-              <a:rPr lang="zh-CN" altLang="en-US" sz="6000" b="1" dirty="0">
+              <a:t>正歌</a:t>
+            </a:r>
+            <a:r>
+              <a:rPr lang="en-US" sz="3200" b="1" dirty="0">
+                <a:solidFill>
+                  <a:srgbClr val="660033"/>
+                </a:solidFill>
                 <a:latin typeface="Microsoft JhengHei" panose="020B0604030504040204" pitchFamily="34" charset="-120"/>
                 <a:ea typeface="Microsoft JhengHei" panose="020B0604030504040204" pitchFamily="34" charset="-120"/>
               </a:rPr>
-              <a:t>祂永遠不離開</a:t>
-            </a:r>
-            <a:r>
-              <a:rPr lang="zh-CN" altLang="en-US" sz="6000" b="1" dirty="0">
-                <a:latin typeface="Microsoft JhengHei" panose="020B0604030504040204" pitchFamily="34" charset="-120"/>
-                <a:ea typeface="Microsoft JhengHei" panose="020B0604030504040204" pitchFamily="34" charset="-120"/>
-              </a:rPr>
-              <a:t>我</a:t>
-            </a:r>
-            <a:endParaRPr lang="en-US" altLang="zh-CN" sz="6000" b="1" dirty="0">
-              <a:latin typeface="Microsoft JhengHei" panose="020B0604030504040204" pitchFamily="34" charset="-120"/>
+              <a:t> )</a:t>
+            </a:r>
+            <a:endParaRPr lang="vi-VN" sz="3200" b="1" dirty="0">
+              <a:solidFill>
+                <a:srgbClr val="660033"/>
+              </a:solidFill>
               <a:ea typeface="Microsoft JhengHei" panose="020B0604030504040204" pitchFamily="34" charset="-120"/>
             </a:endParaRPr>
           </a:p>
-          <a:p>
-            <a:pPr marL="0" indent="0" algn="ctr">
-              <a:buNone/>
-            </a:pPr>
-            <a:r>
-              <a:rPr lang="zh-CN" altLang="en-US" sz="6000" b="1" dirty="0">
-                <a:latin typeface="Microsoft JhengHei" panose="020B0604030504040204" pitchFamily="34" charset="-120"/>
-                <a:ea typeface="Microsoft JhengHei" panose="020B0604030504040204" pitchFamily="34" charset="-120"/>
-              </a:rPr>
-              <a:t>祂因我歡欣快樂</a:t>
-            </a:r>
-            <a:endParaRPr lang="en-US" altLang="zh-CN" sz="6000" b="1" dirty="0">
-              <a:latin typeface="Microsoft JhengHei" panose="020B0604030504040204" pitchFamily="34" charset="-120"/>
-              <a:ea typeface="Microsoft JhengHei" panose="020B0604030504040204" pitchFamily="34" charset="-120"/>
-            </a:endParaRPr>
-          </a:p>
-          <a:p>
-            <a:pPr marL="0" indent="0" algn="ctr">
-              <a:buNone/>
-            </a:pPr>
-            <a:r>
-              <a:rPr lang="zh-CN" altLang="en-US" sz="6000" b="1" dirty="0">
-                <a:latin typeface="Microsoft JhengHei" panose="020B0604030504040204" pitchFamily="34" charset="-120"/>
-                <a:ea typeface="Microsoft JhengHei" panose="020B0604030504040204" pitchFamily="34" charset="-120"/>
-              </a:rPr>
-              <a:t>祂永遠不停止愛我</a:t>
-            </a:r>
-            <a:endParaRPr lang="en-US" altLang="zh-CN" sz="6000" b="1" dirty="0">
-              <a:latin typeface="Microsoft JhengHei" panose="020B0604030504040204" pitchFamily="34" charset="-120"/>
-              <a:ea typeface="Microsoft JhengHei" panose="020B0604030504040204" pitchFamily="34" charset="-120"/>
-            </a:endParaRPr>
-          </a:p>
         </p:txBody>
       </p:sp>
     </p:spTree>
-    <p:extLst>
-      <p:ext uri="{BB962C8B-B14F-4D97-AF65-F5344CB8AC3E}">
-        <p14:creationId xmlns:p14="http://schemas.microsoft.com/office/powerpoint/2010/main" val="4077206318"/>
-      </p:ext>
-    </p:extLst>
   </p:cSld>
   <p:clrMapOvr>
     <a:masterClrMapping/>
@@ -3399,7 +3309,13 @@
   <p:cSld>
     <p:spTree>
       <p:nvGrpSpPr>
-        <p:cNvPr id="1" name=""/>
+        <p:cNvPr id="1" name="">
+          <a:extLst>
+            <a:ext uri="{FF2B5EF4-FFF2-40B4-BE49-F238E27FC236}">
+              <a16:creationId xmlns:a16="http://schemas.microsoft.com/office/drawing/2014/main" id="{62CDF161-FDAF-93A2-7705-49202C8D457A}"/>
+            </a:ext>
+          </a:extLst>
+        </p:cNvPr>
         <p:cNvGrpSpPr/>
         <p:nvPr/>
       </p:nvGrpSpPr>
@@ -3413,118 +3329,133 @@
       </p:grpSpPr>
       <p:sp>
         <p:nvSpPr>
-          <p:cNvPr id="2" name="Title 1"/>
-          <p:cNvSpPr>
-            <a:spLocks noGrp="1"/>
-          </p:cNvSpPr>
-          <p:nvPr>
-            <p:ph type="title"/>
-          </p:nvPr>
-        </p:nvSpPr>
-        <p:spPr/>
-        <p:txBody>
-          <a:bodyPr>
+          <p:cNvPr id="5" name="內容版面配置區 4">
+            <a:extLst>
+              <a:ext uri="{FF2B5EF4-FFF2-40B4-BE49-F238E27FC236}">
+                <a16:creationId xmlns:a16="http://schemas.microsoft.com/office/drawing/2014/main" id="{DDBE005A-8ACF-19C4-035A-DA674D0143B6}"/>
+              </a:ext>
+            </a:extLst>
+          </p:cNvPr>
+          <p:cNvSpPr>
+            <a:spLocks noGrp="1"/>
+          </p:cNvSpPr>
+          <p:nvPr>
+            <p:ph idx="1"/>
+          </p:nvPr>
+        </p:nvSpPr>
+        <p:spPr>
+          <a:xfrm>
+            <a:off x="0" y="2084851"/>
+            <a:ext cx="12192000" cy="2404863"/>
+          </a:xfrm>
+        </p:spPr>
+        <p:txBody>
+          <a:bodyPr anchor="ctr">
             <a:normAutofit/>
           </a:bodyPr>
           <a:lstStyle/>
           <a:p>
-            <a:r>
-              <a:rPr lang="zh-CN" altLang="en-US" sz="4800" b="1" dirty="0" smtClean="0">
+            <a:pPr algn="ctr">
+              <a:buNone/>
+            </a:pPr>
+            <a:r>
+              <a:rPr lang="zh-TW" altLang="en-US" sz="6400" b="1" dirty="0">
+                <a:solidFill>
+                  <a:srgbClr val="660033"/>
+                </a:solidFill>
+                <a:latin typeface="微軟正黑體" pitchFamily="34" charset="-120"/>
+                <a:ea typeface="微軟正黑體" pitchFamily="34" charset="-120"/>
+              </a:rPr>
+              <a:t>不論高矮或胖瘦</a:t>
+            </a:r>
+            <a:endParaRPr lang="en-US" altLang="zh-TW" sz="6400" b="1" dirty="0">
+              <a:solidFill>
+                <a:srgbClr val="660033"/>
+              </a:solidFill>
+              <a:latin typeface="微軟正黑體" pitchFamily="34" charset="-120"/>
+              <a:ea typeface="微軟正黑體" pitchFamily="34" charset="-120"/>
+            </a:endParaRPr>
+          </a:p>
+          <a:p>
+            <a:pPr algn="ctr">
+              <a:buNone/>
+            </a:pPr>
+            <a:r>
+              <a:rPr lang="zh-TW" altLang="en-US" sz="6400" b="1" dirty="0">
+                <a:solidFill>
+                  <a:srgbClr val="660033"/>
+                </a:solidFill>
+                <a:latin typeface="微軟正黑體" pitchFamily="34" charset="-120"/>
+                <a:ea typeface="微軟正黑體" pitchFamily="34" charset="-120"/>
+              </a:rPr>
+              <a:t>未來成就是如何</a:t>
+            </a:r>
+          </a:p>
+        </p:txBody>
+      </p:sp>
+      <p:sp>
+        <p:nvSpPr>
+          <p:cNvPr id="3" name="TextBox 2">
+            <a:extLst>
+              <a:ext uri="{FF2B5EF4-FFF2-40B4-BE49-F238E27FC236}">
+                <a16:creationId xmlns:a16="http://schemas.microsoft.com/office/drawing/2014/main" id="{AC12AABE-C705-0358-EF21-69D6E56A9C0F}"/>
+              </a:ext>
+            </a:extLst>
+          </p:cNvPr>
+          <p:cNvSpPr txBox="1"/>
+          <p:nvPr/>
+        </p:nvSpPr>
+        <p:spPr>
+          <a:xfrm>
+            <a:off x="0" y="5157193"/>
+            <a:ext cx="12192000" cy="584775"/>
+          </a:xfrm>
+          <a:prstGeom prst="rect">
+            <a:avLst/>
+          </a:prstGeom>
+          <a:noFill/>
+        </p:spPr>
+        <p:txBody>
+          <a:bodyPr wrap="square" rtlCol="0">
+            <a:spAutoFit/>
+          </a:bodyPr>
+          <a:lstStyle/>
+          <a:p>
+            <a:pPr algn="ctr"/>
+            <a:r>
+              <a:rPr lang="en-US" sz="3200" b="1" dirty="0">
+                <a:solidFill>
+                  <a:srgbClr val="660033"/>
+                </a:solidFill>
                 <a:latin typeface="Microsoft JhengHei" panose="020B0604030504040204" pitchFamily="34" charset="-120"/>
                 <a:ea typeface="Microsoft JhengHei" panose="020B0604030504040204" pitchFamily="34" charset="-120"/>
               </a:rPr>
-              <a:t>愛我的天父</a:t>
-            </a:r>
-            <a:endParaRPr lang="vi-VN" sz="4800" b="1" dirty="0">
-              <a:ea typeface="Microsoft JhengHei" panose="020B0604030504040204" pitchFamily="34" charset="-120"/>
-            </a:endParaRPr>
-          </a:p>
-        </p:txBody>
-      </p:sp>
-      <p:sp>
-        <p:nvSpPr>
-          <p:cNvPr id="3" name="Content Placeholder 2"/>
-          <p:cNvSpPr>
-            <a:spLocks noGrp="1"/>
-          </p:cNvSpPr>
-          <p:nvPr>
-            <p:ph idx="1"/>
-          </p:nvPr>
-        </p:nvSpPr>
-        <p:spPr/>
-        <p:txBody>
-          <a:bodyPr>
-            <a:normAutofit/>
-          </a:bodyPr>
-          <a:lstStyle/>
-          <a:p>
-            <a:pPr marL="0" indent="0" algn="ctr">
-              <a:buNone/>
-            </a:pPr>
-            <a:r>
-              <a:rPr lang="zh-CN" altLang="en-US" sz="6000" b="1" dirty="0">
+              <a:t>( </a:t>
+            </a:r>
+            <a:r>
+              <a:rPr lang="zh-CN" altLang="en-US" sz="3200" b="1" dirty="0">
+                <a:solidFill>
+                  <a:srgbClr val="660033"/>
+                </a:solidFill>
                 <a:latin typeface="Microsoft JhengHei" panose="020B0604030504040204" pitchFamily="34" charset="-120"/>
                 <a:ea typeface="Microsoft JhengHei" panose="020B0604030504040204" pitchFamily="34" charset="-120"/>
               </a:rPr>
-              <a:t>我有一位愛我的天父</a:t>
-            </a:r>
-            <a:endParaRPr lang="en-US" altLang="zh-CN" sz="6000" b="1" dirty="0">
-              <a:latin typeface="Microsoft JhengHei" panose="020B0604030504040204" pitchFamily="34" charset="-120"/>
-              <a:ea typeface="Microsoft JhengHei" panose="020B0604030504040204" pitchFamily="34" charset="-120"/>
-            </a:endParaRPr>
-          </a:p>
-          <a:p>
-            <a:pPr marL="0" indent="0" algn="ctr">
-              <a:buNone/>
-            </a:pPr>
-            <a:r>
-              <a:rPr lang="zh-CN" altLang="en-US" sz="6000" b="1" dirty="0">
+              <a:t>正歌</a:t>
+            </a:r>
+            <a:r>
+              <a:rPr lang="en-US" sz="3200" b="1" dirty="0">
+                <a:solidFill>
+                  <a:srgbClr val="660033"/>
+                </a:solidFill>
                 <a:latin typeface="Microsoft JhengHei" panose="020B0604030504040204" pitchFamily="34" charset="-120"/>
                 <a:ea typeface="Microsoft JhengHei" panose="020B0604030504040204" pitchFamily="34" charset="-120"/>
               </a:rPr>
-              <a:t>祂造我就是為了愛我</a:t>
-            </a:r>
-            <a:endParaRPr lang="en-US" altLang="zh-CN" sz="6000" b="1" dirty="0">
-              <a:latin typeface="Microsoft JhengHei" panose="020B0604030504040204" pitchFamily="34" charset="-120"/>
-              <a:ea typeface="Microsoft JhengHei" panose="020B0604030504040204" pitchFamily="34" charset="-120"/>
-            </a:endParaRPr>
-          </a:p>
-          <a:p>
-            <a:pPr marL="0" indent="0" algn="ctr">
-              <a:buNone/>
-            </a:pPr>
-            <a:r>
-              <a:rPr lang="zh-CN" altLang="en-US" sz="6000" b="1" dirty="0">
-                <a:latin typeface="Microsoft JhengHei" panose="020B0604030504040204" pitchFamily="34" charset="-120"/>
-                <a:ea typeface="Microsoft JhengHei" panose="020B0604030504040204" pitchFamily="34" charset="-120"/>
-              </a:rPr>
-              <a:t>不</a:t>
-            </a:r>
-            <a:r>
-              <a:rPr lang="zh-CN" altLang="en-US" sz="6000" b="1" dirty="0">
-                <a:latin typeface="Microsoft JhengHei" panose="020B0604030504040204" pitchFamily="34" charset="-120"/>
-                <a:ea typeface="Microsoft JhengHei" panose="020B0604030504040204" pitchFamily="34" charset="-120"/>
-              </a:rPr>
-              <a:t>論高矮或胖瘦未來成就是如何</a:t>
-            </a:r>
-            <a:endParaRPr lang="en-US" altLang="zh-CN" sz="6000" b="1" dirty="0">
-              <a:latin typeface="Microsoft JhengHei" panose="020B0604030504040204" pitchFamily="34" charset="-120"/>
-              <a:ea typeface="Microsoft JhengHei" panose="020B0604030504040204" pitchFamily="34" charset="-120"/>
-            </a:endParaRPr>
-          </a:p>
-          <a:p>
-            <a:pPr marL="0" indent="0" algn="ctr">
-              <a:buNone/>
-            </a:pPr>
-            <a:r>
-              <a:rPr lang="zh-CN" altLang="en-US" sz="6000" b="1" dirty="0">
-                <a:latin typeface="Microsoft JhengHei" panose="020B0604030504040204" pitchFamily="34" charset="-120"/>
-                <a:ea typeface="Microsoft JhengHei" panose="020B0604030504040204" pitchFamily="34" charset="-120"/>
-              </a:rPr>
-              <a:t>祂仍然比任何人都愛我</a:t>
-            </a:r>
-            <a:endParaRPr lang="en-US" altLang="zh-CN" sz="6000" b="1" dirty="0">
-              <a:latin typeface="Microsoft JhengHei" panose="020B0604030504040204" pitchFamily="34" charset="-120"/>
+              <a:t> )</a:t>
+            </a:r>
+            <a:endParaRPr lang="vi-VN" sz="3200" b="1" dirty="0">
+              <a:solidFill>
+                <a:srgbClr val="660033"/>
+              </a:solidFill>
               <a:ea typeface="Microsoft JhengHei" panose="020B0604030504040204" pitchFamily="34" charset="-120"/>
             </a:endParaRPr>
           </a:p>
@@ -3533,7 +3464,7 @@
     </p:spTree>
     <p:extLst>
       <p:ext uri="{BB962C8B-B14F-4D97-AF65-F5344CB8AC3E}">
-        <p14:creationId xmlns:p14="http://schemas.microsoft.com/office/powerpoint/2010/main" val="2649185724"/>
+        <p14:creationId xmlns:p14="http://schemas.microsoft.com/office/powerpoint/2010/main" val="853287085"/>
       </p:ext>
     </p:extLst>
   </p:cSld>
@@ -3548,7 +3479,13 @@
   <p:cSld>
     <p:spTree>
       <p:nvGrpSpPr>
-        <p:cNvPr id="1" name=""/>
+        <p:cNvPr id="1" name="">
+          <a:extLst>
+            <a:ext uri="{FF2B5EF4-FFF2-40B4-BE49-F238E27FC236}">
+              <a16:creationId xmlns:a16="http://schemas.microsoft.com/office/drawing/2014/main" id="{E0FAD4A9-3230-83E1-0571-538C1A9B43DE}"/>
+            </a:ext>
+          </a:extLst>
+        </p:cNvPr>
         <p:cNvGrpSpPr/>
         <p:nvPr/>
       </p:nvGrpSpPr>
@@ -3562,146 +3499,457 @@
       </p:grpSpPr>
       <p:sp>
         <p:nvSpPr>
-          <p:cNvPr id="2" name="Title 1"/>
-          <p:cNvSpPr>
-            <a:spLocks noGrp="1"/>
-          </p:cNvSpPr>
-          <p:nvPr>
-            <p:ph type="title"/>
-          </p:nvPr>
-        </p:nvSpPr>
-        <p:spPr/>
-        <p:txBody>
-          <a:bodyPr>
+          <p:cNvPr id="5" name="內容版面配置區 4">
+            <a:extLst>
+              <a:ext uri="{FF2B5EF4-FFF2-40B4-BE49-F238E27FC236}">
+                <a16:creationId xmlns:a16="http://schemas.microsoft.com/office/drawing/2014/main" id="{47DBA4F2-7F82-5A24-A2A1-1BB7AFA75F0A}"/>
+              </a:ext>
+            </a:extLst>
+          </p:cNvPr>
+          <p:cNvSpPr>
+            <a:spLocks noGrp="1"/>
+          </p:cNvSpPr>
+          <p:nvPr>
+            <p:ph idx="1"/>
+          </p:nvPr>
+        </p:nvSpPr>
+        <p:spPr>
+          <a:xfrm>
+            <a:off x="0" y="2084851"/>
+            <a:ext cx="12192000" cy="2404863"/>
+          </a:xfrm>
+        </p:spPr>
+        <p:txBody>
+          <a:bodyPr anchor="ctr">
             <a:normAutofit/>
           </a:bodyPr>
           <a:lstStyle/>
           <a:p>
-            <a:r>
-              <a:rPr lang="zh-CN" altLang="en-US" sz="4800" b="1" dirty="0" smtClean="0">
+            <a:pPr algn="ctr">
+              <a:buNone/>
+            </a:pPr>
+            <a:r>
+              <a:rPr lang="zh-TW" altLang="en-US" sz="6400" b="1" dirty="0">
+                <a:solidFill>
+                  <a:srgbClr val="660033"/>
+                </a:solidFill>
+                <a:latin typeface="微軟正黑體" pitchFamily="34" charset="-120"/>
+                <a:ea typeface="微軟正黑體" pitchFamily="34" charset="-120"/>
+              </a:rPr>
+              <a:t>祂仍然比任何人都愛我</a:t>
+            </a:r>
+          </a:p>
+        </p:txBody>
+      </p:sp>
+      <p:sp>
+        <p:nvSpPr>
+          <p:cNvPr id="3" name="TextBox 2">
+            <a:extLst>
+              <a:ext uri="{FF2B5EF4-FFF2-40B4-BE49-F238E27FC236}">
+                <a16:creationId xmlns:a16="http://schemas.microsoft.com/office/drawing/2014/main" id="{6A84959C-E461-1770-B7FB-FA41FEBD0526}"/>
+              </a:ext>
+            </a:extLst>
+          </p:cNvPr>
+          <p:cNvSpPr txBox="1"/>
+          <p:nvPr/>
+        </p:nvSpPr>
+        <p:spPr>
+          <a:xfrm>
+            <a:off x="0" y="5157193"/>
+            <a:ext cx="12192000" cy="584775"/>
+          </a:xfrm>
+          <a:prstGeom prst="rect">
+            <a:avLst/>
+          </a:prstGeom>
+          <a:noFill/>
+        </p:spPr>
+        <p:txBody>
+          <a:bodyPr wrap="square" rtlCol="0">
+            <a:spAutoFit/>
+          </a:bodyPr>
+          <a:lstStyle/>
+          <a:p>
+            <a:pPr algn="ctr"/>
+            <a:r>
+              <a:rPr lang="en-US" sz="3200" b="1" dirty="0">
+                <a:solidFill>
+                  <a:srgbClr val="660033"/>
+                </a:solidFill>
                 <a:latin typeface="Microsoft JhengHei" panose="020B0604030504040204" pitchFamily="34" charset="-120"/>
                 <a:ea typeface="Microsoft JhengHei" panose="020B0604030504040204" pitchFamily="34" charset="-120"/>
               </a:rPr>
-              <a:t>愛我的天父</a:t>
-            </a:r>
-            <a:endParaRPr lang="vi-VN" sz="4800" b="1" dirty="0">
-              <a:ea typeface="Microsoft JhengHei" panose="020B0604030504040204" pitchFamily="34" charset="-120"/>
-            </a:endParaRPr>
-          </a:p>
-        </p:txBody>
-      </p:sp>
-      <p:sp>
-        <p:nvSpPr>
-          <p:cNvPr id="3" name="Content Placeholder 2"/>
-          <p:cNvSpPr>
-            <a:spLocks noGrp="1"/>
-          </p:cNvSpPr>
-          <p:nvPr>
-            <p:ph idx="1"/>
-          </p:nvPr>
-        </p:nvSpPr>
-        <p:spPr/>
-        <p:txBody>
-          <a:bodyPr>
-            <a:normAutofit/>
-          </a:bodyPr>
-          <a:lstStyle/>
-          <a:p>
-            <a:pPr marL="0" indent="0" algn="ctr">
-              <a:buNone/>
-            </a:pPr>
-            <a:r>
-              <a:rPr lang="zh-CN" altLang="en-US" sz="6000" b="1" dirty="0">
+              <a:t>( </a:t>
+            </a:r>
+            <a:r>
+              <a:rPr lang="zh-CN" altLang="en-US" sz="3200" b="1" dirty="0">
+                <a:solidFill>
+                  <a:srgbClr val="660033"/>
+                </a:solidFill>
                 <a:latin typeface="Microsoft JhengHei" panose="020B0604030504040204" pitchFamily="34" charset="-120"/>
                 <a:ea typeface="Microsoft JhengHei" panose="020B0604030504040204" pitchFamily="34" charset="-120"/>
               </a:rPr>
-              <a:t>祢</a:t>
-            </a:r>
-            <a:r>
-              <a:rPr lang="zh-CN" altLang="en-US" sz="6000" b="1" dirty="0">
+              <a:t>正歌</a:t>
+            </a:r>
+            <a:r>
+              <a:rPr lang="en-US" sz="3200" b="1" dirty="0">
+                <a:solidFill>
+                  <a:srgbClr val="660033"/>
+                </a:solidFill>
                 <a:latin typeface="Microsoft JhengHei" panose="020B0604030504040204" pitchFamily="34" charset="-120"/>
                 <a:ea typeface="Microsoft JhengHei" panose="020B0604030504040204" pitchFamily="34" charset="-120"/>
               </a:rPr>
-              <a:t>永</a:t>
-            </a:r>
-            <a:r>
-              <a:rPr lang="zh-CN" altLang="en-US" sz="6000" b="1" dirty="0">
+              <a:t> )</a:t>
+            </a:r>
+            <a:endParaRPr lang="vi-VN" sz="3200" b="1" dirty="0">
+              <a:solidFill>
+                <a:srgbClr val="660033"/>
+              </a:solidFill>
+              <a:ea typeface="Microsoft JhengHei" panose="020B0604030504040204" pitchFamily="34" charset="-120"/>
+            </a:endParaRPr>
+          </a:p>
+        </p:txBody>
+      </p:sp>
+    </p:spTree>
+    <p:extLst>
+      <p:ext uri="{BB962C8B-B14F-4D97-AF65-F5344CB8AC3E}">
+        <p14:creationId xmlns:p14="http://schemas.microsoft.com/office/powerpoint/2010/main" val="1189057972"/>
+      </p:ext>
+    </p:extLst>
+  </p:cSld>
+  <p:clrMapOvr>
+    <a:masterClrMapping/>
+  </p:clrMapOvr>
+</p:sld>
+</file>
+
+<file path=ppt/slides/slide5.xml><?xml version="1.0" encoding="utf-8"?>
+<p:sld xmlns:a="http://schemas.openxmlformats.org/drawingml/2006/main" xmlns:r="http://schemas.openxmlformats.org/officeDocument/2006/relationships" xmlns:p="http://schemas.openxmlformats.org/presentationml/2006/main">
+  <p:cSld>
+    <p:spTree>
+      <p:nvGrpSpPr>
+        <p:cNvPr id="1" name="">
+          <a:extLst>
+            <a:ext uri="{FF2B5EF4-FFF2-40B4-BE49-F238E27FC236}">
+              <a16:creationId xmlns:a16="http://schemas.microsoft.com/office/drawing/2014/main" id="{5AC25B24-19AA-DD1B-3AAC-1B5ECCA2737A}"/>
+            </a:ext>
+          </a:extLst>
+        </p:cNvPr>
+        <p:cNvGrpSpPr/>
+        <p:nvPr/>
+      </p:nvGrpSpPr>
+      <p:grpSpPr>
+        <a:xfrm>
+          <a:off x="0" y="0"/>
+          <a:ext cx="0" cy="0"/>
+          <a:chOff x="0" y="0"/>
+          <a:chExt cx="0" cy="0"/>
+        </a:xfrm>
+      </p:grpSpPr>
+      <p:sp>
+        <p:nvSpPr>
+          <p:cNvPr id="5" name="內容版面配置區 4">
+            <a:extLst>
+              <a:ext uri="{FF2B5EF4-FFF2-40B4-BE49-F238E27FC236}">
+                <a16:creationId xmlns:a16="http://schemas.microsoft.com/office/drawing/2014/main" id="{D35C48B2-547B-52B0-2579-98BEA2CC555D}"/>
+              </a:ext>
+            </a:extLst>
+          </p:cNvPr>
+          <p:cNvSpPr>
+            <a:spLocks noGrp="1"/>
+          </p:cNvSpPr>
+          <p:nvPr>
+            <p:ph idx="1"/>
+          </p:nvPr>
+        </p:nvSpPr>
+        <p:spPr>
+          <a:xfrm>
+            <a:off x="0" y="2084851"/>
+            <a:ext cx="12192000" cy="2404863"/>
+          </a:xfrm>
+        </p:spPr>
+        <p:txBody>
+          <a:bodyPr anchor="ctr">
+            <a:normAutofit/>
+          </a:bodyPr>
+          <a:lstStyle/>
+          <a:p>
+            <a:pPr algn="ctr">
+              <a:buNone/>
+            </a:pPr>
+            <a:r>
+              <a:rPr lang="zh-TW" altLang="en-US" sz="6400" b="1" dirty="0">
+                <a:solidFill>
+                  <a:srgbClr val="660033"/>
+                </a:solidFill>
+                <a:latin typeface="微軟正黑體" pitchFamily="34" charset="-120"/>
+                <a:ea typeface="微軟正黑體" pitchFamily="34" charset="-120"/>
+              </a:rPr>
+              <a:t>祂永遠不離開我</a:t>
+            </a:r>
+          </a:p>
+          <a:p>
+            <a:pPr algn="ctr">
+              <a:buNone/>
+            </a:pPr>
+            <a:r>
+              <a:rPr lang="zh-TW" altLang="en-US" sz="6400" b="1" dirty="0">
+                <a:solidFill>
+                  <a:srgbClr val="660033"/>
+                </a:solidFill>
+                <a:latin typeface="微軟正黑體" pitchFamily="34" charset="-120"/>
+                <a:ea typeface="微軟正黑體" pitchFamily="34" charset="-120"/>
+              </a:rPr>
+              <a:t>祂永遠不離開我</a:t>
+            </a:r>
+          </a:p>
+        </p:txBody>
+      </p:sp>
+      <p:sp>
+        <p:nvSpPr>
+          <p:cNvPr id="3" name="TextBox 2">
+            <a:extLst>
+              <a:ext uri="{FF2B5EF4-FFF2-40B4-BE49-F238E27FC236}">
+                <a16:creationId xmlns:a16="http://schemas.microsoft.com/office/drawing/2014/main" id="{CFEB42CC-D0EC-4AEF-D14A-D63DE0B0DBCD}"/>
+              </a:ext>
+            </a:extLst>
+          </p:cNvPr>
+          <p:cNvSpPr txBox="1"/>
+          <p:nvPr/>
+        </p:nvSpPr>
+        <p:spPr>
+          <a:xfrm>
+            <a:off x="0" y="5157193"/>
+            <a:ext cx="12192000" cy="584775"/>
+          </a:xfrm>
+          <a:prstGeom prst="rect">
+            <a:avLst/>
+          </a:prstGeom>
+          <a:noFill/>
+        </p:spPr>
+        <p:txBody>
+          <a:bodyPr wrap="square" rtlCol="0">
+            <a:spAutoFit/>
+          </a:bodyPr>
+          <a:lstStyle/>
+          <a:p>
+            <a:pPr algn="ctr"/>
+            <a:r>
+              <a:rPr lang="en-US" sz="3200" b="1" dirty="0">
+                <a:solidFill>
+                  <a:srgbClr val="660033"/>
+                </a:solidFill>
                 <a:latin typeface="Microsoft JhengHei" panose="020B0604030504040204" pitchFamily="34" charset="-120"/>
                 <a:ea typeface="Microsoft JhengHei" panose="020B0604030504040204" pitchFamily="34" charset="-120"/>
               </a:rPr>
-              <a:t>遠不離開我</a:t>
-            </a:r>
-            <a:endParaRPr lang="en-US" altLang="zh-CN" sz="6000" b="1" dirty="0">
-              <a:latin typeface="Microsoft JhengHei" panose="020B0604030504040204" pitchFamily="34" charset="-120"/>
-              <a:ea typeface="Microsoft JhengHei" panose="020B0604030504040204" pitchFamily="34" charset="-120"/>
-            </a:endParaRPr>
-          </a:p>
-          <a:p>
-            <a:pPr marL="0" indent="0" algn="ctr">
-              <a:buNone/>
-            </a:pPr>
-            <a:r>
-              <a:rPr lang="zh-CN" altLang="en-US" sz="6000" b="1" dirty="0">
+              <a:t>( </a:t>
+            </a:r>
+            <a:r>
+              <a:rPr lang="zh-CN" altLang="en-US" sz="3200" b="1" dirty="0">
+                <a:solidFill>
+                  <a:srgbClr val="660033"/>
+                </a:solidFill>
                 <a:latin typeface="Microsoft JhengHei" panose="020B0604030504040204" pitchFamily="34" charset="-120"/>
                 <a:ea typeface="Microsoft JhengHei" panose="020B0604030504040204" pitchFamily="34" charset="-120"/>
               </a:rPr>
-              <a:t>祢永遠不離開</a:t>
-            </a:r>
-            <a:r>
-              <a:rPr lang="zh-CN" altLang="en-US" sz="6000" b="1" dirty="0">
+              <a:t>副歌 </a:t>
+            </a:r>
+            <a:r>
+              <a:rPr lang="en-US" altLang="zh-CN" sz="3200" b="1" dirty="0">
+                <a:solidFill>
+                  <a:srgbClr val="660033"/>
+                </a:solidFill>
                 <a:latin typeface="Microsoft JhengHei" panose="020B0604030504040204" pitchFamily="34" charset="-120"/>
                 <a:ea typeface="Microsoft JhengHei" panose="020B0604030504040204" pitchFamily="34" charset="-120"/>
               </a:rPr>
-              <a:t>我</a:t>
-            </a:r>
-            <a:endParaRPr lang="en-US" altLang="zh-CN" sz="6000" b="1" dirty="0">
-              <a:latin typeface="Microsoft JhengHei" panose="020B0604030504040204" pitchFamily="34" charset="-120"/>
-              <a:ea typeface="Microsoft JhengHei" panose="020B0604030504040204" pitchFamily="34" charset="-120"/>
-            </a:endParaRPr>
-          </a:p>
-          <a:p>
-            <a:pPr marL="0" indent="0" algn="ctr">
-              <a:buNone/>
-            </a:pPr>
-            <a:r>
-              <a:rPr lang="zh-CN" altLang="en-US" sz="6000" b="1" dirty="0">
+              <a:t>1</a:t>
+            </a:r>
+            <a:r>
+              <a:rPr lang="en-US" sz="3200" b="1" dirty="0">
+                <a:solidFill>
+                  <a:srgbClr val="660033"/>
+                </a:solidFill>
                 <a:latin typeface="Microsoft JhengHei" panose="020B0604030504040204" pitchFamily="34" charset="-120"/>
                 <a:ea typeface="Microsoft JhengHei" panose="020B0604030504040204" pitchFamily="34" charset="-120"/>
               </a:rPr>
-              <a:t>祢因</a:t>
-            </a:r>
-            <a:r>
-              <a:rPr lang="zh-CN" altLang="en-US" sz="6000" b="1" dirty="0">
+              <a:t> )</a:t>
+            </a:r>
+            <a:endParaRPr lang="vi-VN" sz="3200" b="1" dirty="0">
+              <a:solidFill>
+                <a:srgbClr val="660033"/>
+              </a:solidFill>
+              <a:ea typeface="Microsoft JhengHei" panose="020B0604030504040204" pitchFamily="34" charset="-120"/>
+            </a:endParaRPr>
+          </a:p>
+        </p:txBody>
+      </p:sp>
+    </p:spTree>
+    <p:extLst>
+      <p:ext uri="{BB962C8B-B14F-4D97-AF65-F5344CB8AC3E}">
+        <p14:creationId xmlns:p14="http://schemas.microsoft.com/office/powerpoint/2010/main" val="376448894"/>
+      </p:ext>
+    </p:extLst>
+  </p:cSld>
+  <p:clrMapOvr>
+    <a:masterClrMapping/>
+  </p:clrMapOvr>
+</p:sld>
+</file>
+
+<file path=ppt/slides/slide6.xml><?xml version="1.0" encoding="utf-8"?>
+<p:sld xmlns:a="http://schemas.openxmlformats.org/drawingml/2006/main" xmlns:r="http://schemas.openxmlformats.org/officeDocument/2006/relationships" xmlns:p="http://schemas.openxmlformats.org/presentationml/2006/main">
+  <p:cSld>
+    <p:spTree>
+      <p:nvGrpSpPr>
+        <p:cNvPr id="1" name="">
+          <a:extLst>
+            <a:ext uri="{FF2B5EF4-FFF2-40B4-BE49-F238E27FC236}">
+              <a16:creationId xmlns:a16="http://schemas.microsoft.com/office/drawing/2014/main" id="{76EEDB14-7A83-425C-294D-DE167B2BECFF}"/>
+            </a:ext>
+          </a:extLst>
+        </p:cNvPr>
+        <p:cNvGrpSpPr/>
+        <p:nvPr/>
+      </p:nvGrpSpPr>
+      <p:grpSpPr>
+        <a:xfrm>
+          <a:off x="0" y="0"/>
+          <a:ext cx="0" cy="0"/>
+          <a:chOff x="0" y="0"/>
+          <a:chExt cx="0" cy="0"/>
+        </a:xfrm>
+      </p:grpSpPr>
+      <p:sp>
+        <p:nvSpPr>
+          <p:cNvPr id="5" name="內容版面配置區 4">
+            <a:extLst>
+              <a:ext uri="{FF2B5EF4-FFF2-40B4-BE49-F238E27FC236}">
+                <a16:creationId xmlns:a16="http://schemas.microsoft.com/office/drawing/2014/main" id="{7FF00597-F020-F199-8E9D-3339E3EEC7CF}"/>
+              </a:ext>
+            </a:extLst>
+          </p:cNvPr>
+          <p:cNvSpPr>
+            <a:spLocks noGrp="1"/>
+          </p:cNvSpPr>
+          <p:nvPr>
+            <p:ph idx="1"/>
+          </p:nvPr>
+        </p:nvSpPr>
+        <p:spPr>
+          <a:xfrm>
+            <a:off x="0" y="2084851"/>
+            <a:ext cx="12192000" cy="2404863"/>
+          </a:xfrm>
+        </p:spPr>
+        <p:txBody>
+          <a:bodyPr anchor="ctr">
+            <a:normAutofit/>
+          </a:bodyPr>
+          <a:lstStyle/>
+          <a:p>
+            <a:pPr algn="ctr">
+              <a:buNone/>
+            </a:pPr>
+            <a:r>
+              <a:rPr lang="zh-TW" altLang="en-US" sz="6400" b="1" dirty="0">
+                <a:solidFill>
+                  <a:srgbClr val="660033"/>
+                </a:solidFill>
+                <a:latin typeface="微軟正黑體" pitchFamily="34" charset="-120"/>
+                <a:ea typeface="微軟正黑體" pitchFamily="34" charset="-120"/>
+              </a:rPr>
+              <a:t>祂因我歡欣快樂</a:t>
+            </a:r>
+          </a:p>
+          <a:p>
+            <a:pPr algn="ctr">
+              <a:buNone/>
+            </a:pPr>
+            <a:r>
+              <a:rPr lang="zh-TW" altLang="en-US" sz="6400" b="1" dirty="0">
+                <a:solidFill>
+                  <a:srgbClr val="660033"/>
+                </a:solidFill>
+                <a:latin typeface="微軟正黑體" pitchFamily="34" charset="-120"/>
+                <a:ea typeface="微軟正黑體" pitchFamily="34" charset="-120"/>
+              </a:rPr>
+              <a:t>祂永遠不停止愛我</a:t>
+            </a:r>
+          </a:p>
+        </p:txBody>
+      </p:sp>
+      <p:sp>
+        <p:nvSpPr>
+          <p:cNvPr id="3" name="TextBox 2">
+            <a:extLst>
+              <a:ext uri="{FF2B5EF4-FFF2-40B4-BE49-F238E27FC236}">
+                <a16:creationId xmlns:a16="http://schemas.microsoft.com/office/drawing/2014/main" id="{909DC57E-19BE-A50C-C9B1-7D8AF9AE53DA}"/>
+              </a:ext>
+            </a:extLst>
+          </p:cNvPr>
+          <p:cNvSpPr txBox="1"/>
+          <p:nvPr/>
+        </p:nvSpPr>
+        <p:spPr>
+          <a:xfrm>
+            <a:off x="0" y="5157193"/>
+            <a:ext cx="12192000" cy="584775"/>
+          </a:xfrm>
+          <a:prstGeom prst="rect">
+            <a:avLst/>
+          </a:prstGeom>
+          <a:noFill/>
+        </p:spPr>
+        <p:txBody>
+          <a:bodyPr wrap="square" rtlCol="0">
+            <a:spAutoFit/>
+          </a:bodyPr>
+          <a:lstStyle/>
+          <a:p>
+            <a:pPr algn="ctr"/>
+            <a:r>
+              <a:rPr lang="en-US" sz="3200" b="1" dirty="0">
+                <a:solidFill>
+                  <a:srgbClr val="660033"/>
+                </a:solidFill>
                 <a:latin typeface="Microsoft JhengHei" panose="020B0604030504040204" pitchFamily="34" charset="-120"/>
                 <a:ea typeface="Microsoft JhengHei" panose="020B0604030504040204" pitchFamily="34" charset="-120"/>
               </a:rPr>
-              <a:t>我歡欣快樂</a:t>
-            </a:r>
-            <a:endParaRPr lang="en-US" altLang="zh-CN" sz="6000" b="1" dirty="0">
-              <a:latin typeface="Microsoft JhengHei" panose="020B0604030504040204" pitchFamily="34" charset="-120"/>
-              <a:ea typeface="Microsoft JhengHei" panose="020B0604030504040204" pitchFamily="34" charset="-120"/>
-            </a:endParaRPr>
-          </a:p>
-          <a:p>
-            <a:pPr marL="0" indent="0" algn="ctr">
-              <a:buNone/>
-            </a:pPr>
-            <a:r>
-              <a:rPr lang="zh-CN" altLang="en-US" sz="6000" b="1" dirty="0">
+              <a:t>( </a:t>
+            </a:r>
+            <a:r>
+              <a:rPr lang="zh-CN" altLang="en-US" sz="3200" b="1" dirty="0">
+                <a:solidFill>
+                  <a:srgbClr val="660033"/>
+                </a:solidFill>
                 <a:latin typeface="Microsoft JhengHei" panose="020B0604030504040204" pitchFamily="34" charset="-120"/>
                 <a:ea typeface="Microsoft JhengHei" panose="020B0604030504040204" pitchFamily="34" charset="-120"/>
               </a:rPr>
-              <a:t>祢永</a:t>
-            </a:r>
-            <a:r>
-              <a:rPr lang="zh-CN" altLang="en-US" sz="6000" b="1" dirty="0">
+              <a:t>副歌 </a:t>
+            </a:r>
+            <a:r>
+              <a:rPr lang="en-US" altLang="zh-CN" sz="3200" b="1" dirty="0">
+                <a:solidFill>
+                  <a:srgbClr val="660033"/>
+                </a:solidFill>
                 <a:latin typeface="Microsoft JhengHei" panose="020B0604030504040204" pitchFamily="34" charset="-120"/>
                 <a:ea typeface="Microsoft JhengHei" panose="020B0604030504040204" pitchFamily="34" charset="-120"/>
               </a:rPr>
-              <a:t>遠不停止愛我</a:t>
-            </a:r>
-            <a:endParaRPr lang="en-US" altLang="zh-CN" sz="6000" b="1" dirty="0">
-              <a:latin typeface="Microsoft JhengHei" panose="020B0604030504040204" pitchFamily="34" charset="-120"/>
+              <a:t>1</a:t>
+            </a:r>
+            <a:r>
+              <a:rPr lang="en-US" sz="3200" b="1" dirty="0">
+                <a:solidFill>
+                  <a:srgbClr val="660033"/>
+                </a:solidFill>
+                <a:latin typeface="Microsoft JhengHei" panose="020B0604030504040204" pitchFamily="34" charset="-120"/>
+                <a:ea typeface="Microsoft JhengHei" panose="020B0604030504040204" pitchFamily="34" charset="-120"/>
+              </a:rPr>
+              <a:t> )</a:t>
+            </a:r>
+            <a:endParaRPr lang="vi-VN" sz="3200" b="1" dirty="0">
+              <a:solidFill>
+                <a:srgbClr val="660033"/>
+              </a:solidFill>
               <a:ea typeface="Microsoft JhengHei" panose="020B0604030504040204" pitchFamily="34" charset="-120"/>
             </a:endParaRPr>
           </a:p>
@@ -3710,7 +3958,353 @@
     </p:spTree>
     <p:extLst>
       <p:ext uri="{BB962C8B-B14F-4D97-AF65-F5344CB8AC3E}">
-        <p14:creationId xmlns:p14="http://schemas.microsoft.com/office/powerpoint/2010/main" val="464384874"/>
+        <p14:creationId xmlns:p14="http://schemas.microsoft.com/office/powerpoint/2010/main" val="2120558521"/>
+      </p:ext>
+    </p:extLst>
+  </p:cSld>
+  <p:clrMapOvr>
+    <a:masterClrMapping/>
+  </p:clrMapOvr>
+</p:sld>
+</file>
+
+<file path=ppt/slides/slide7.xml><?xml version="1.0" encoding="utf-8"?>
+<p:sld xmlns:a="http://schemas.openxmlformats.org/drawingml/2006/main" xmlns:r="http://schemas.openxmlformats.org/officeDocument/2006/relationships" xmlns:p="http://schemas.openxmlformats.org/presentationml/2006/main">
+  <p:cSld>
+    <p:spTree>
+      <p:nvGrpSpPr>
+        <p:cNvPr id="1" name="">
+          <a:extLst>
+            <a:ext uri="{FF2B5EF4-FFF2-40B4-BE49-F238E27FC236}">
+              <a16:creationId xmlns:a16="http://schemas.microsoft.com/office/drawing/2014/main" id="{E441F559-B058-6AFF-4401-E9E99D80FEE3}"/>
+            </a:ext>
+          </a:extLst>
+        </p:cNvPr>
+        <p:cNvGrpSpPr/>
+        <p:nvPr/>
+      </p:nvGrpSpPr>
+      <p:grpSpPr>
+        <a:xfrm>
+          <a:off x="0" y="0"/>
+          <a:ext cx="0" cy="0"/>
+          <a:chOff x="0" y="0"/>
+          <a:chExt cx="0" cy="0"/>
+        </a:xfrm>
+      </p:grpSpPr>
+      <p:sp>
+        <p:nvSpPr>
+          <p:cNvPr id="5" name="內容版面配置區 4">
+            <a:extLst>
+              <a:ext uri="{FF2B5EF4-FFF2-40B4-BE49-F238E27FC236}">
+                <a16:creationId xmlns:a16="http://schemas.microsoft.com/office/drawing/2014/main" id="{17E3146D-F5DE-EE53-8A5A-8AF858ED0915}"/>
+              </a:ext>
+            </a:extLst>
+          </p:cNvPr>
+          <p:cNvSpPr>
+            <a:spLocks noGrp="1"/>
+          </p:cNvSpPr>
+          <p:nvPr>
+            <p:ph idx="1"/>
+          </p:nvPr>
+        </p:nvSpPr>
+        <p:spPr>
+          <a:xfrm>
+            <a:off x="0" y="2084851"/>
+            <a:ext cx="12192000" cy="2404863"/>
+          </a:xfrm>
+        </p:spPr>
+        <p:txBody>
+          <a:bodyPr anchor="ctr">
+            <a:normAutofit/>
+          </a:bodyPr>
+          <a:lstStyle/>
+          <a:p>
+            <a:pPr algn="ctr">
+              <a:buNone/>
+            </a:pPr>
+            <a:r>
+              <a:rPr lang="zh-TW" altLang="en-US" sz="6400" b="1" dirty="0">
+                <a:solidFill>
+                  <a:srgbClr val="660033"/>
+                </a:solidFill>
+                <a:latin typeface="微軟正黑體" pitchFamily="34" charset="-120"/>
+                <a:ea typeface="微軟正黑體" pitchFamily="34" charset="-120"/>
+              </a:rPr>
+              <a:t>祢永遠不離開我</a:t>
+            </a:r>
+          </a:p>
+          <a:p>
+            <a:pPr algn="ctr">
+              <a:buNone/>
+            </a:pPr>
+            <a:r>
+              <a:rPr lang="zh-TW" altLang="en-US" sz="6400" b="1" dirty="0">
+                <a:solidFill>
+                  <a:srgbClr val="660033"/>
+                </a:solidFill>
+                <a:latin typeface="微軟正黑體" pitchFamily="34" charset="-120"/>
+                <a:ea typeface="微軟正黑體" pitchFamily="34" charset="-120"/>
+              </a:rPr>
+              <a:t>祢永遠不離開我</a:t>
+            </a:r>
+          </a:p>
+        </p:txBody>
+      </p:sp>
+      <p:sp>
+        <p:nvSpPr>
+          <p:cNvPr id="3" name="TextBox 2">
+            <a:extLst>
+              <a:ext uri="{FF2B5EF4-FFF2-40B4-BE49-F238E27FC236}">
+                <a16:creationId xmlns:a16="http://schemas.microsoft.com/office/drawing/2014/main" id="{22B8D915-E543-C594-E7D6-E127AFA20EAF}"/>
+              </a:ext>
+            </a:extLst>
+          </p:cNvPr>
+          <p:cNvSpPr txBox="1"/>
+          <p:nvPr/>
+        </p:nvSpPr>
+        <p:spPr>
+          <a:xfrm>
+            <a:off x="0" y="5157193"/>
+            <a:ext cx="12192000" cy="584775"/>
+          </a:xfrm>
+          <a:prstGeom prst="rect">
+            <a:avLst/>
+          </a:prstGeom>
+          <a:noFill/>
+        </p:spPr>
+        <p:txBody>
+          <a:bodyPr wrap="square" rtlCol="0">
+            <a:spAutoFit/>
+          </a:bodyPr>
+          <a:lstStyle/>
+          <a:p>
+            <a:pPr algn="ctr"/>
+            <a:r>
+              <a:rPr lang="en-US" sz="3200" b="1" dirty="0">
+                <a:solidFill>
+                  <a:srgbClr val="660033"/>
+                </a:solidFill>
+                <a:latin typeface="Microsoft JhengHei" panose="020B0604030504040204" pitchFamily="34" charset="-120"/>
+                <a:ea typeface="Microsoft JhengHei" panose="020B0604030504040204" pitchFamily="34" charset="-120"/>
+              </a:rPr>
+              <a:t>( </a:t>
+            </a:r>
+            <a:r>
+              <a:rPr lang="zh-CN" altLang="en-US" sz="3200" b="1" dirty="0">
+                <a:solidFill>
+                  <a:srgbClr val="660033"/>
+                </a:solidFill>
+                <a:latin typeface="Microsoft JhengHei" panose="020B0604030504040204" pitchFamily="34" charset="-120"/>
+                <a:ea typeface="Microsoft JhengHei" panose="020B0604030504040204" pitchFamily="34" charset="-120"/>
+              </a:rPr>
+              <a:t>副歌 </a:t>
+            </a:r>
+            <a:r>
+              <a:rPr lang="en-US" altLang="zh-CN" sz="3200" b="1" dirty="0">
+                <a:solidFill>
+                  <a:srgbClr val="660033"/>
+                </a:solidFill>
+                <a:latin typeface="Microsoft JhengHei" panose="020B0604030504040204" pitchFamily="34" charset="-120"/>
+                <a:ea typeface="Microsoft JhengHei" panose="020B0604030504040204" pitchFamily="34" charset="-120"/>
+              </a:rPr>
+              <a:t>2</a:t>
+            </a:r>
+            <a:r>
+              <a:rPr lang="en-US" sz="3200" b="1" dirty="0">
+                <a:solidFill>
+                  <a:srgbClr val="660033"/>
+                </a:solidFill>
+                <a:latin typeface="Microsoft JhengHei" panose="020B0604030504040204" pitchFamily="34" charset="-120"/>
+                <a:ea typeface="Microsoft JhengHei" panose="020B0604030504040204" pitchFamily="34" charset="-120"/>
+              </a:rPr>
+              <a:t> )</a:t>
+            </a:r>
+            <a:endParaRPr lang="vi-VN" sz="3200" b="1" dirty="0">
+              <a:solidFill>
+                <a:srgbClr val="660033"/>
+              </a:solidFill>
+              <a:ea typeface="Microsoft JhengHei" panose="020B0604030504040204" pitchFamily="34" charset="-120"/>
+            </a:endParaRPr>
+          </a:p>
+        </p:txBody>
+      </p:sp>
+    </p:spTree>
+    <p:extLst>
+      <p:ext uri="{BB962C8B-B14F-4D97-AF65-F5344CB8AC3E}">
+        <p14:creationId xmlns:p14="http://schemas.microsoft.com/office/powerpoint/2010/main" val="623256081"/>
+      </p:ext>
+    </p:extLst>
+  </p:cSld>
+  <p:clrMapOvr>
+    <a:masterClrMapping/>
+  </p:clrMapOvr>
+</p:sld>
+</file>
+
+<file path=ppt/slides/slide8.xml><?xml version="1.0" encoding="utf-8"?>
+<p:sld xmlns:a="http://schemas.openxmlformats.org/drawingml/2006/main" xmlns:r="http://schemas.openxmlformats.org/officeDocument/2006/relationships" xmlns:p="http://schemas.openxmlformats.org/presentationml/2006/main">
+  <p:cSld>
+    <p:spTree>
+      <p:nvGrpSpPr>
+        <p:cNvPr id="1" name="">
+          <a:extLst>
+            <a:ext uri="{FF2B5EF4-FFF2-40B4-BE49-F238E27FC236}">
+              <a16:creationId xmlns:a16="http://schemas.microsoft.com/office/drawing/2014/main" id="{C1D3939A-D007-557A-A8A3-F8ACAFAF6C37}"/>
+            </a:ext>
+          </a:extLst>
+        </p:cNvPr>
+        <p:cNvGrpSpPr/>
+        <p:nvPr/>
+      </p:nvGrpSpPr>
+      <p:grpSpPr>
+        <a:xfrm>
+          <a:off x="0" y="0"/>
+          <a:ext cx="0" cy="0"/>
+          <a:chOff x="0" y="0"/>
+          <a:chExt cx="0" cy="0"/>
+        </a:xfrm>
+      </p:grpSpPr>
+      <p:sp>
+        <p:nvSpPr>
+          <p:cNvPr id="5" name="內容版面配置區 4">
+            <a:extLst>
+              <a:ext uri="{FF2B5EF4-FFF2-40B4-BE49-F238E27FC236}">
+                <a16:creationId xmlns:a16="http://schemas.microsoft.com/office/drawing/2014/main" id="{666718DB-FAFA-A475-8CF7-731D9F0B49B0}"/>
+              </a:ext>
+            </a:extLst>
+          </p:cNvPr>
+          <p:cNvSpPr>
+            <a:spLocks noGrp="1"/>
+          </p:cNvSpPr>
+          <p:nvPr>
+            <p:ph idx="1"/>
+          </p:nvPr>
+        </p:nvSpPr>
+        <p:spPr>
+          <a:xfrm>
+            <a:off x="0" y="2084851"/>
+            <a:ext cx="12192000" cy="2404863"/>
+          </a:xfrm>
+        </p:spPr>
+        <p:txBody>
+          <a:bodyPr anchor="ctr">
+            <a:normAutofit/>
+          </a:bodyPr>
+          <a:lstStyle/>
+          <a:p>
+            <a:pPr algn="ctr">
+              <a:buNone/>
+            </a:pPr>
+            <a:r>
+              <a:rPr lang="zh-TW" altLang="en-US" sz="6400" b="1" dirty="0">
+                <a:solidFill>
+                  <a:srgbClr val="660033"/>
+                </a:solidFill>
+                <a:latin typeface="微軟正黑體" pitchFamily="34" charset="-120"/>
+                <a:ea typeface="微軟正黑體" pitchFamily="34" charset="-120"/>
+              </a:rPr>
+              <a:t>祢因我歡欣快樂</a:t>
+            </a:r>
+          </a:p>
+          <a:p>
+            <a:pPr algn="ctr">
+              <a:buNone/>
+            </a:pPr>
+            <a:r>
+              <a:rPr lang="zh-TW" altLang="en-US" sz="6400" b="1" dirty="0">
+                <a:solidFill>
+                  <a:srgbClr val="660033"/>
+                </a:solidFill>
+                <a:latin typeface="微軟正黑體" pitchFamily="34" charset="-120"/>
+                <a:ea typeface="微軟正黑體" pitchFamily="34" charset="-120"/>
+              </a:rPr>
+              <a:t>祢永遠不停止愛我</a:t>
+            </a:r>
+          </a:p>
+        </p:txBody>
+      </p:sp>
+      <p:sp>
+        <p:nvSpPr>
+          <p:cNvPr id="3" name="TextBox 2">
+            <a:extLst>
+              <a:ext uri="{FF2B5EF4-FFF2-40B4-BE49-F238E27FC236}">
+                <a16:creationId xmlns:a16="http://schemas.microsoft.com/office/drawing/2014/main" id="{859FB87B-4FDC-EB73-2B61-8A5AF2DB4053}"/>
+              </a:ext>
+            </a:extLst>
+          </p:cNvPr>
+          <p:cNvSpPr txBox="1"/>
+          <p:nvPr/>
+        </p:nvSpPr>
+        <p:spPr>
+          <a:xfrm>
+            <a:off x="0" y="5157193"/>
+            <a:ext cx="12192000" cy="584775"/>
+          </a:xfrm>
+          <a:prstGeom prst="rect">
+            <a:avLst/>
+          </a:prstGeom>
+          <a:noFill/>
+        </p:spPr>
+        <p:txBody>
+          <a:bodyPr wrap="square" rtlCol="0">
+            <a:spAutoFit/>
+          </a:bodyPr>
+          <a:lstStyle/>
+          <a:p>
+            <a:pPr algn="ctr"/>
+            <a:r>
+              <a:rPr lang="en-US" sz="3200" b="1" dirty="0">
+                <a:solidFill>
+                  <a:srgbClr val="660033"/>
+                </a:solidFill>
+                <a:latin typeface="Microsoft JhengHei" panose="020B0604030504040204" pitchFamily="34" charset="-120"/>
+                <a:ea typeface="Microsoft JhengHei" panose="020B0604030504040204" pitchFamily="34" charset="-120"/>
+              </a:rPr>
+              <a:t>( </a:t>
+            </a:r>
+            <a:r>
+              <a:rPr lang="zh-CN" altLang="en-US" sz="3200" b="1" dirty="0">
+                <a:solidFill>
+                  <a:srgbClr val="660033"/>
+                </a:solidFill>
+                <a:latin typeface="Microsoft JhengHei" panose="020B0604030504040204" pitchFamily="34" charset="-120"/>
+                <a:ea typeface="Microsoft JhengHei" panose="020B0604030504040204" pitchFamily="34" charset="-120"/>
+              </a:rPr>
+              <a:t>副歌 </a:t>
+            </a:r>
+            <a:r>
+              <a:rPr lang="en-US" altLang="zh-CN" sz="3200" b="1" dirty="0">
+                <a:solidFill>
+                  <a:srgbClr val="660033"/>
+                </a:solidFill>
+                <a:latin typeface="Microsoft JhengHei" panose="020B0604030504040204" pitchFamily="34" charset="-120"/>
+                <a:ea typeface="Microsoft JhengHei" panose="020B0604030504040204" pitchFamily="34" charset="-120"/>
+              </a:rPr>
+              <a:t>2</a:t>
+            </a:r>
+            <a:r>
+              <a:rPr lang="en-US" sz="3200" b="1" dirty="0">
+                <a:solidFill>
+                  <a:srgbClr val="660033"/>
+                </a:solidFill>
+                <a:latin typeface="Microsoft JhengHei" panose="020B0604030504040204" pitchFamily="34" charset="-120"/>
+                <a:ea typeface="Microsoft JhengHei" panose="020B0604030504040204" pitchFamily="34" charset="-120"/>
+              </a:rPr>
+              <a:t> )</a:t>
+            </a:r>
+            <a:endParaRPr lang="vi-VN" sz="3200" b="1" dirty="0">
+              <a:solidFill>
+                <a:srgbClr val="660033"/>
+              </a:solidFill>
+              <a:ea typeface="Microsoft JhengHei" panose="020B0604030504040204" pitchFamily="34" charset="-120"/>
+            </a:endParaRPr>
+          </a:p>
+        </p:txBody>
+      </p:sp>
+    </p:spTree>
+    <p:extLst>
+      <p:ext uri="{BB962C8B-B14F-4D97-AF65-F5344CB8AC3E}">
+        <p14:creationId xmlns:p14="http://schemas.microsoft.com/office/powerpoint/2010/main" val="510458409"/>
       </p:ext>
     </p:extLst>
   </p:cSld>
